--- a/sharp/Описание игры.pptx
+++ b/sharp/Описание игры.pptx
@@ -203,7 +203,7 @@
             <a:fld id="{D42B9B73-3143-4350-BBED-DEE082F6FAFE}" type="datetimeFigureOut">
               <a:rPr lang="ru-RU" smtClean="0"/>
               <a:pPr/>
-              <a:t>06.04.2025</a:t>
+              <a:t>28.04.2026</a:t>
             </a:fld>
             <a:endParaRPr lang="ru-RU"/>
           </a:p>
@@ -651,7 +651,7 @@
             <a:fld id="{0FF7147C-2AAC-473E-AD87-1A0FFEE67DAA}" type="datetimeFigureOut">
               <a:rPr lang="ru-RU" smtClean="0"/>
               <a:pPr/>
-              <a:t>06.04.2025</a:t>
+              <a:t>28.04.2026</a:t>
             </a:fld>
             <a:endParaRPr lang="ru-RU"/>
           </a:p>
@@ -818,7 +818,7 @@
             <a:fld id="{0FF7147C-2AAC-473E-AD87-1A0FFEE67DAA}" type="datetimeFigureOut">
               <a:rPr lang="ru-RU" smtClean="0"/>
               <a:pPr/>
-              <a:t>06.04.2025</a:t>
+              <a:t>28.04.2026</a:t>
             </a:fld>
             <a:endParaRPr lang="ru-RU"/>
           </a:p>
@@ -995,7 +995,7 @@
             <a:fld id="{0FF7147C-2AAC-473E-AD87-1A0FFEE67DAA}" type="datetimeFigureOut">
               <a:rPr lang="ru-RU" smtClean="0"/>
               <a:pPr/>
-              <a:t>06.04.2025</a:t>
+              <a:t>28.04.2026</a:t>
             </a:fld>
             <a:endParaRPr lang="ru-RU"/>
           </a:p>
@@ -1162,7 +1162,7 @@
             <a:fld id="{0FF7147C-2AAC-473E-AD87-1A0FFEE67DAA}" type="datetimeFigureOut">
               <a:rPr lang="ru-RU" smtClean="0"/>
               <a:pPr/>
-              <a:t>06.04.2025</a:t>
+              <a:t>28.04.2026</a:t>
             </a:fld>
             <a:endParaRPr lang="ru-RU"/>
           </a:p>
@@ -1405,7 +1405,7 @@
             <a:fld id="{0FF7147C-2AAC-473E-AD87-1A0FFEE67DAA}" type="datetimeFigureOut">
               <a:rPr lang="ru-RU" smtClean="0"/>
               <a:pPr/>
-              <a:t>06.04.2025</a:t>
+              <a:t>28.04.2026</a:t>
             </a:fld>
             <a:endParaRPr lang="ru-RU"/>
           </a:p>
@@ -1690,7 +1690,7 @@
             <a:fld id="{0FF7147C-2AAC-473E-AD87-1A0FFEE67DAA}" type="datetimeFigureOut">
               <a:rPr lang="ru-RU" smtClean="0"/>
               <a:pPr/>
-              <a:t>06.04.2025</a:t>
+              <a:t>28.04.2026</a:t>
             </a:fld>
             <a:endParaRPr lang="ru-RU"/>
           </a:p>
@@ -2109,7 +2109,7 @@
             <a:fld id="{0FF7147C-2AAC-473E-AD87-1A0FFEE67DAA}" type="datetimeFigureOut">
               <a:rPr lang="ru-RU" smtClean="0"/>
               <a:pPr/>
-              <a:t>06.04.2025</a:t>
+              <a:t>28.04.2026</a:t>
             </a:fld>
             <a:endParaRPr lang="ru-RU"/>
           </a:p>
@@ -2224,7 +2224,7 @@
             <a:fld id="{0FF7147C-2AAC-473E-AD87-1A0FFEE67DAA}" type="datetimeFigureOut">
               <a:rPr lang="ru-RU" smtClean="0"/>
               <a:pPr/>
-              <a:t>06.04.2025</a:t>
+              <a:t>28.04.2026</a:t>
             </a:fld>
             <a:endParaRPr lang="ru-RU"/>
           </a:p>
@@ -2316,7 +2316,7 @@
             <a:fld id="{0FF7147C-2AAC-473E-AD87-1A0FFEE67DAA}" type="datetimeFigureOut">
               <a:rPr lang="ru-RU" smtClean="0"/>
               <a:pPr/>
-              <a:t>06.04.2025</a:t>
+              <a:t>28.04.2026</a:t>
             </a:fld>
             <a:endParaRPr lang="ru-RU"/>
           </a:p>
@@ -2590,7 +2590,7 @@
             <a:fld id="{0FF7147C-2AAC-473E-AD87-1A0FFEE67DAA}" type="datetimeFigureOut">
               <a:rPr lang="ru-RU" smtClean="0"/>
               <a:pPr/>
-              <a:t>06.04.2025</a:t>
+              <a:t>28.04.2026</a:t>
             </a:fld>
             <a:endParaRPr lang="ru-RU"/>
           </a:p>
@@ -2840,7 +2840,7 @@
             <a:fld id="{0FF7147C-2AAC-473E-AD87-1A0FFEE67DAA}" type="datetimeFigureOut">
               <a:rPr lang="ru-RU" smtClean="0"/>
               <a:pPr/>
-              <a:t>06.04.2025</a:t>
+              <a:t>28.04.2026</a:t>
             </a:fld>
             <a:endParaRPr lang="ru-RU"/>
           </a:p>
@@ -3050,7 +3050,7 @@
             <a:fld id="{0FF7147C-2AAC-473E-AD87-1A0FFEE67DAA}" type="datetimeFigureOut">
               <a:rPr lang="ru-RU" smtClean="0"/>
               <a:pPr/>
-              <a:t>06.04.2025</a:t>
+              <a:t>28.04.2026</a:t>
             </a:fld>
             <a:endParaRPr lang="ru-RU"/>
           </a:p>
@@ -4378,39 +4378,6 @@
           <a:chExt cx="0" cy="0"/>
         </a:xfrm>
       </p:grpSpPr>
-      <p:pic>
-        <p:nvPicPr>
-          <p:cNvPr id="1026" name="Picture 2"/>
-          <p:cNvPicPr>
-            <a:picLocks noChangeAspect="1" noChangeArrowheads="1"/>
-          </p:cNvPicPr>
-          <p:nvPr/>
-        </p:nvPicPr>
-        <p:blipFill>
-          <a:blip r:embed="rId2" cstate="print"/>
-          <a:srcRect/>
-          <a:stretch>
-            <a:fillRect/>
-          </a:stretch>
-        </p:blipFill>
-        <p:spPr bwMode="auto">
-          <a:xfrm>
-            <a:off x="2214546" y="785794"/>
-            <a:ext cx="4743382" cy="4743382"/>
-          </a:xfrm>
-          <a:prstGeom prst="rect">
-            <a:avLst/>
-          </a:prstGeom>
-          <a:noFill/>
-          <a:ln w="9525">
-            <a:noFill/>
-            <a:miter lim="800000"/>
-            <a:headEnd/>
-            <a:tailEnd/>
-          </a:ln>
-          <a:effectLst/>
-        </p:spPr>
-      </p:pic>
       <p:sp>
         <p:nvSpPr>
           <p:cNvPr id="10" name="Rectangle 1"/>
@@ -4447,21 +4414,13 @@
           </a:bodyPr>
           <a:lstStyle/>
           <a:p>
-            <a:pPr marL="0" marR="0" lvl="0" indent="0" algn="just" defTabSz="914400" rtl="0" eaLnBrk="1" fontAlgn="base" latinLnBrk="0" hangingPunct="1">
-              <a:lnSpc>
-                <a:spcPct val="100000"/>
-              </a:lnSpc>
+            <a:pPr lvl="0" algn="just" fontAlgn="base">
               <a:spcBef>
                 <a:spcPct val="0"/>
               </a:spcBef>
               <a:spcAft>
                 <a:spcPct val="0"/>
               </a:spcAft>
-              <a:buClrTx/>
-              <a:buSzTx/>
-              <a:buFontTx/>
-              <a:buNone/>
-              <a:tabLst/>
             </a:pPr>
             <a:r>
               <a:rPr kumimoji="0" lang="ru-RU" sz="2400" b="0" i="0" u="none" strike="noStrike" cap="none" normalizeH="0" baseline="0" dirty="0" smtClean="0">
@@ -4476,7 +4435,22 @@
                 <a:ea typeface="Calibri" pitchFamily="34" charset="0"/>
                 <a:cs typeface="Times New Roman" pitchFamily="18" charset="0"/>
               </a:rPr>
-              <a:t>После </a:t>
+              <a:t>После прохождения</a:t>
+            </a:r>
+            <a:r>
+              <a:rPr kumimoji="0" lang="en-US" sz="2400" b="0" i="0" u="none" strike="noStrike" cap="none" normalizeH="0" baseline="0" dirty="0" smtClean="0">
+                <a:ln>
+                  <a:noFill/>
+                </a:ln>
+                <a:solidFill>
+                  <a:schemeClr val="tx1"/>
+                </a:solidFill>
+                <a:effectLst/>
+                <a:latin typeface="Times New Roman" pitchFamily="18" charset="0"/>
+                <a:ea typeface="Calibri" pitchFamily="34" charset="0"/>
+                <a:cs typeface="Times New Roman" pitchFamily="18" charset="0"/>
+              </a:rPr>
+              <a:t> </a:t>
             </a:r>
             <a:r>
               <a:rPr kumimoji="0" lang="ru-RU" sz="2400" b="0" i="0" u="none" strike="noStrike" cap="none" normalizeH="0" baseline="0" dirty="0" smtClean="0">
@@ -4491,67 +4465,15 @@
                 <a:ea typeface="Calibri" pitchFamily="34" charset="0"/>
                 <a:cs typeface="Times New Roman" pitchFamily="18" charset="0"/>
               </a:rPr>
-              <a:t>прохождения</a:t>
-            </a:r>
-            <a:r>
-              <a:rPr kumimoji="0" lang="en-US" sz="2400" b="0" i="0" u="none" strike="noStrike" cap="none" normalizeH="0" baseline="0" dirty="0" smtClean="0">
-                <a:ln>
-                  <a:noFill/>
-                </a:ln>
-                <a:solidFill>
-                  <a:schemeClr val="tx1"/>
-                </a:solidFill>
-                <a:effectLst/>
+              <a:t>игры пройдите также, пожалуйста, опрос по ссылке: </a:t>
+            </a:r>
+            <a:r>
+              <a:rPr lang="en-US" sz="2400" b="1" dirty="0" smtClean="0">
                 <a:latin typeface="Times New Roman" pitchFamily="18" charset="0"/>
                 <a:ea typeface="Calibri" pitchFamily="34" charset="0"/>
                 <a:cs typeface="Times New Roman" pitchFamily="18" charset="0"/>
               </a:rPr>
-              <a:t> </a:t>
-            </a:r>
-            <a:r>
-              <a:rPr kumimoji="0" lang="ru-RU" sz="2400" b="0" i="0" u="none" strike="noStrike" cap="none" normalizeH="0" baseline="0" dirty="0" smtClean="0">
-                <a:ln>
-                  <a:noFill/>
-                </a:ln>
-                <a:solidFill>
-                  <a:schemeClr val="tx1"/>
-                </a:solidFill>
-                <a:effectLst/>
-                <a:latin typeface="Times New Roman" pitchFamily="18" charset="0"/>
-                <a:ea typeface="Calibri" pitchFamily="34" charset="0"/>
-                <a:cs typeface="Times New Roman" pitchFamily="18" charset="0"/>
-              </a:rPr>
-              <a:t>игры пройдите также, </a:t>
-            </a:r>
-            <a:r>
-              <a:rPr kumimoji="0" lang="ru-RU" sz="2400" b="0" i="0" u="none" strike="noStrike" cap="none" normalizeH="0" baseline="0" dirty="0" smtClean="0">
-                <a:ln>
-                  <a:noFill/>
-                </a:ln>
-                <a:solidFill>
-                  <a:schemeClr val="tx1"/>
-                </a:solidFill>
-                <a:effectLst/>
-                <a:latin typeface="Times New Roman" pitchFamily="18" charset="0"/>
-                <a:ea typeface="Calibri" pitchFamily="34" charset="0"/>
-                <a:cs typeface="Times New Roman" pitchFamily="18" charset="0"/>
-              </a:rPr>
-              <a:t>пожалуйста, опрос по ссылке: </a:t>
-            </a:r>
-            <a:r>
-              <a:rPr kumimoji="0" lang="ru-RU" sz="2400" b="1" i="0" u="none" strike="noStrike" cap="none" normalizeH="0" baseline="0" dirty="0" smtClean="0">
-                <a:ln>
-                  <a:noFill/>
-                </a:ln>
-                <a:solidFill>
-                  <a:schemeClr val="tx1"/>
-                </a:solidFill>
-                <a:effectLst/>
-                <a:latin typeface="Times New Roman" pitchFamily="18" charset="0"/>
-                <a:ea typeface="Calibri" pitchFamily="34" charset="0"/>
-                <a:cs typeface="Times New Roman" pitchFamily="18" charset="0"/>
-              </a:rPr>
-              <a:t>https://forms.gle/oGj6SziNQV7dn2GKA</a:t>
+              <a:t>https://forms.gle/kqqAHNFHCafzWAPAA</a:t>
             </a:r>
             <a:endParaRPr kumimoji="0" lang="ru-RU" sz="2400" b="0" i="0" u="none" strike="noStrike" cap="none" normalizeH="0" baseline="0" dirty="0" smtClean="0">
               <a:ln>
@@ -4567,6 +4489,39 @@
           </a:p>
         </p:txBody>
       </p:sp>
+      <p:pic>
+        <p:nvPicPr>
+          <p:cNvPr id="2" name="Picture 2"/>
+          <p:cNvPicPr>
+            <a:picLocks noChangeAspect="1" noChangeArrowheads="1"/>
+          </p:cNvPicPr>
+          <p:nvPr/>
+        </p:nvPicPr>
+        <p:blipFill>
+          <a:blip r:embed="rId2"/>
+          <a:srcRect/>
+          <a:stretch>
+            <a:fillRect/>
+          </a:stretch>
+        </p:blipFill>
+        <p:spPr bwMode="auto">
+          <a:xfrm>
+            <a:off x="1857356" y="357166"/>
+            <a:ext cx="5257800" cy="5257800"/>
+          </a:xfrm>
+          <a:prstGeom prst="rect">
+            <a:avLst/>
+          </a:prstGeom>
+          <a:noFill/>
+          <a:ln w="9525">
+            <a:noFill/>
+            <a:miter lim="800000"/>
+            <a:headEnd/>
+            <a:tailEnd/>
+          </a:ln>
+          <a:effectLst/>
+        </p:spPr>
+      </p:pic>
     </p:spTree>
   </p:cSld>
   <p:clrMapOvr>

--- a/sharp/Описание игры.pptx
+++ b/sharp/Описание игры.pptx
@@ -18,7 +18,7 @@
     <p:sldId id="295" r:id="rId9"/>
     <p:sldId id="293" r:id="rId10"/>
     <p:sldId id="294" r:id="rId11"/>
-    <p:sldId id="296" r:id="rId12"/>
+    <p:sldId id="297" r:id="rId12"/>
   </p:sldIdLst>
   <p:sldSz cx="9144000" cy="6858000" type="screen4x3"/>
   <p:notesSz cx="6858000" cy="9144000"/>
@@ -203,7 +203,7 @@
             <a:fld id="{D42B9B73-3143-4350-BBED-DEE082F6FAFE}" type="datetimeFigureOut">
               <a:rPr lang="ru-RU" smtClean="0"/>
               <a:pPr/>
-              <a:t>28.04.2026</a:t>
+              <a:t>14.05.2026</a:t>
             </a:fld>
             <a:endParaRPr lang="ru-RU"/>
           </a:p>
@@ -651,7 +651,7 @@
             <a:fld id="{0FF7147C-2AAC-473E-AD87-1A0FFEE67DAA}" type="datetimeFigureOut">
               <a:rPr lang="ru-RU" smtClean="0"/>
               <a:pPr/>
-              <a:t>28.04.2026</a:t>
+              <a:t>14.05.2026</a:t>
             </a:fld>
             <a:endParaRPr lang="ru-RU"/>
           </a:p>
@@ -818,7 +818,7 @@
             <a:fld id="{0FF7147C-2AAC-473E-AD87-1A0FFEE67DAA}" type="datetimeFigureOut">
               <a:rPr lang="ru-RU" smtClean="0"/>
               <a:pPr/>
-              <a:t>28.04.2026</a:t>
+              <a:t>14.05.2026</a:t>
             </a:fld>
             <a:endParaRPr lang="ru-RU"/>
           </a:p>
@@ -995,7 +995,7 @@
             <a:fld id="{0FF7147C-2AAC-473E-AD87-1A0FFEE67DAA}" type="datetimeFigureOut">
               <a:rPr lang="ru-RU" smtClean="0"/>
               <a:pPr/>
-              <a:t>28.04.2026</a:t>
+              <a:t>14.05.2026</a:t>
             </a:fld>
             <a:endParaRPr lang="ru-RU"/>
           </a:p>
@@ -1162,7 +1162,7 @@
             <a:fld id="{0FF7147C-2AAC-473E-AD87-1A0FFEE67DAA}" type="datetimeFigureOut">
               <a:rPr lang="ru-RU" smtClean="0"/>
               <a:pPr/>
-              <a:t>28.04.2026</a:t>
+              <a:t>14.05.2026</a:t>
             </a:fld>
             <a:endParaRPr lang="ru-RU"/>
           </a:p>
@@ -1405,7 +1405,7 @@
             <a:fld id="{0FF7147C-2AAC-473E-AD87-1A0FFEE67DAA}" type="datetimeFigureOut">
               <a:rPr lang="ru-RU" smtClean="0"/>
               <a:pPr/>
-              <a:t>28.04.2026</a:t>
+              <a:t>14.05.2026</a:t>
             </a:fld>
             <a:endParaRPr lang="ru-RU"/>
           </a:p>
@@ -1690,7 +1690,7 @@
             <a:fld id="{0FF7147C-2AAC-473E-AD87-1A0FFEE67DAA}" type="datetimeFigureOut">
               <a:rPr lang="ru-RU" smtClean="0"/>
               <a:pPr/>
-              <a:t>28.04.2026</a:t>
+              <a:t>14.05.2026</a:t>
             </a:fld>
             <a:endParaRPr lang="ru-RU"/>
           </a:p>
@@ -2109,7 +2109,7 @@
             <a:fld id="{0FF7147C-2AAC-473E-AD87-1A0FFEE67DAA}" type="datetimeFigureOut">
               <a:rPr lang="ru-RU" smtClean="0"/>
               <a:pPr/>
-              <a:t>28.04.2026</a:t>
+              <a:t>14.05.2026</a:t>
             </a:fld>
             <a:endParaRPr lang="ru-RU"/>
           </a:p>
@@ -2224,7 +2224,7 @@
             <a:fld id="{0FF7147C-2AAC-473E-AD87-1A0FFEE67DAA}" type="datetimeFigureOut">
               <a:rPr lang="ru-RU" smtClean="0"/>
               <a:pPr/>
-              <a:t>28.04.2026</a:t>
+              <a:t>14.05.2026</a:t>
             </a:fld>
             <a:endParaRPr lang="ru-RU"/>
           </a:p>
@@ -2316,7 +2316,7 @@
             <a:fld id="{0FF7147C-2AAC-473E-AD87-1A0FFEE67DAA}" type="datetimeFigureOut">
               <a:rPr lang="ru-RU" smtClean="0"/>
               <a:pPr/>
-              <a:t>28.04.2026</a:t>
+              <a:t>14.05.2026</a:t>
             </a:fld>
             <a:endParaRPr lang="ru-RU"/>
           </a:p>
@@ -2590,7 +2590,7 @@
             <a:fld id="{0FF7147C-2AAC-473E-AD87-1A0FFEE67DAA}" type="datetimeFigureOut">
               <a:rPr lang="ru-RU" smtClean="0"/>
               <a:pPr/>
-              <a:t>28.04.2026</a:t>
+              <a:t>14.05.2026</a:t>
             </a:fld>
             <a:endParaRPr lang="ru-RU"/>
           </a:p>
@@ -2840,7 +2840,7 @@
             <a:fld id="{0FF7147C-2AAC-473E-AD87-1A0FFEE67DAA}" type="datetimeFigureOut">
               <a:rPr lang="ru-RU" smtClean="0"/>
               <a:pPr/>
-              <a:t>28.04.2026</a:t>
+              <a:t>14.05.2026</a:t>
             </a:fld>
             <a:endParaRPr lang="ru-RU"/>
           </a:p>
@@ -3050,7 +3050,7 @@
             <a:fld id="{0FF7147C-2AAC-473E-AD87-1A0FFEE67DAA}" type="datetimeFigureOut">
               <a:rPr lang="ru-RU" smtClean="0"/>
               <a:pPr/>
-              <a:t>28.04.2026</a:t>
+              <a:t>14.05.2026</a:t>
             </a:fld>
             <a:endParaRPr lang="ru-RU"/>
           </a:p>
@@ -4473,7 +4473,7 @@
                 <a:ea typeface="Calibri" pitchFamily="34" charset="0"/>
                 <a:cs typeface="Times New Roman" pitchFamily="18" charset="0"/>
               </a:rPr>
-              <a:t>https://forms.gle/kqqAHNFHCafzWAPAA</a:t>
+              <a:t>https://forms.gle/BfK5rF7NyGjxiPGq8</a:t>
             </a:r>
             <a:endParaRPr kumimoji="0" lang="ru-RU" sz="2400" b="0" i="0" u="none" strike="noStrike" cap="none" normalizeH="0" baseline="0" dirty="0" smtClean="0">
               <a:ln>
@@ -4491,7 +4491,7 @@
       </p:sp>
       <p:pic>
         <p:nvPicPr>
-          <p:cNvPr id="2" name="Picture 2"/>
+          <p:cNvPr id="1026" name="Picture 2" descr="http://qrcoder.ru/code/?https%3A%2F%2Fforms.gle%2FBfK5rF7NyGjxiPGq8&amp;10&amp;0"/>
           <p:cNvPicPr>
             <a:picLocks noChangeAspect="1" noChangeArrowheads="1"/>
           </p:cNvPicPr>
@@ -4506,20 +4506,13 @@
         </p:blipFill>
         <p:spPr bwMode="auto">
           <a:xfrm>
-            <a:off x="1857356" y="357166"/>
-            <a:ext cx="5257800" cy="5257800"/>
+            <a:off x="2143108" y="714356"/>
+            <a:ext cx="4810134" cy="4810138"/>
           </a:xfrm>
           <a:prstGeom prst="rect">
             <a:avLst/>
           </a:prstGeom>
           <a:noFill/>
-          <a:ln w="9525">
-            <a:noFill/>
-            <a:miter lim="800000"/>
-            <a:headEnd/>
-            <a:tailEnd/>
-          </a:ln>
-          <a:effectLst/>
         </p:spPr>
       </p:pic>
     </p:spTree>
